--- a/decks/maintaining-2024/source/deck.pptx
+++ b/decks/maintaining-2024/source/deck.pptx
@@ -22077,7 +22077,7 @@
                 <a:cs typeface="Inter"/>
                 <a:sym typeface="Inter"/>
               </a:rPr>
-              <a:t>Rahmat - Sr. Customer Solutions Architect</a:t>
+              <a:t>Sr. Customer Solutions Architect</a:t>
             </a:r>
             <a:endParaRPr sz="1500">
               <a:solidFill>
